--- a/Aula 06.pptx
+++ b/Aula 06.pptx
@@ -114,6 +114,11 @@
       </a:defRPr>
     </a:lvl9pPr>
   </p:defaultTextStyle>
+  <p:extLst>
+    <p:ext uri="{EFAFB233-063F-42B5-8137-9DF3F51BA10A}">
+      <p15:sldGuideLst xmlns:p15="http://schemas.microsoft.com/office/powerpoint/2012/main"/>
+    </p:ext>
+  </p:extLst>
 </p:presentation>
 </file>
 
@@ -264,7 +269,7 @@
           <a:p>
             <a:fld id="{E568B946-2B74-4A25-A991-D91986269CF7}" type="datetimeFigureOut">
               <a:rPr lang="pt-BR" smtClean="0"/>
-              <a:t>06/04/2026</a:t>
+              <a:t>07/04/2026</a:t>
             </a:fld>
             <a:endParaRPr lang="pt-BR"/>
           </a:p>
@@ -462,7 +467,7 @@
           <a:p>
             <a:fld id="{E568B946-2B74-4A25-A991-D91986269CF7}" type="datetimeFigureOut">
               <a:rPr lang="pt-BR" smtClean="0"/>
-              <a:t>06/04/2026</a:t>
+              <a:t>07/04/2026</a:t>
             </a:fld>
             <a:endParaRPr lang="pt-BR"/>
           </a:p>
@@ -670,7 +675,7 @@
           <a:p>
             <a:fld id="{E568B946-2B74-4A25-A991-D91986269CF7}" type="datetimeFigureOut">
               <a:rPr lang="pt-BR" smtClean="0"/>
-              <a:t>06/04/2026</a:t>
+              <a:t>07/04/2026</a:t>
             </a:fld>
             <a:endParaRPr lang="pt-BR"/>
           </a:p>
@@ -868,7 +873,7 @@
           <a:p>
             <a:fld id="{E568B946-2B74-4A25-A991-D91986269CF7}" type="datetimeFigureOut">
               <a:rPr lang="pt-BR" smtClean="0"/>
-              <a:t>06/04/2026</a:t>
+              <a:t>07/04/2026</a:t>
             </a:fld>
             <a:endParaRPr lang="pt-BR"/>
           </a:p>
@@ -1143,7 +1148,7 @@
           <a:p>
             <a:fld id="{E568B946-2B74-4A25-A991-D91986269CF7}" type="datetimeFigureOut">
               <a:rPr lang="pt-BR" smtClean="0"/>
-              <a:t>06/04/2026</a:t>
+              <a:t>07/04/2026</a:t>
             </a:fld>
             <a:endParaRPr lang="pt-BR"/>
           </a:p>
@@ -1408,7 +1413,7 @@
           <a:p>
             <a:fld id="{E568B946-2B74-4A25-A991-D91986269CF7}" type="datetimeFigureOut">
               <a:rPr lang="pt-BR" smtClean="0"/>
-              <a:t>06/04/2026</a:t>
+              <a:t>07/04/2026</a:t>
             </a:fld>
             <a:endParaRPr lang="pt-BR"/>
           </a:p>
@@ -1820,7 +1825,7 @@
           <a:p>
             <a:fld id="{E568B946-2B74-4A25-A991-D91986269CF7}" type="datetimeFigureOut">
               <a:rPr lang="pt-BR" smtClean="0"/>
-              <a:t>06/04/2026</a:t>
+              <a:t>07/04/2026</a:t>
             </a:fld>
             <a:endParaRPr lang="pt-BR"/>
           </a:p>
@@ -1961,7 +1966,7 @@
           <a:p>
             <a:fld id="{E568B946-2B74-4A25-A991-D91986269CF7}" type="datetimeFigureOut">
               <a:rPr lang="pt-BR" smtClean="0"/>
-              <a:t>06/04/2026</a:t>
+              <a:t>07/04/2026</a:t>
             </a:fld>
             <a:endParaRPr lang="pt-BR"/>
           </a:p>
@@ -2074,7 +2079,7 @@
           <a:p>
             <a:fld id="{E568B946-2B74-4A25-A991-D91986269CF7}" type="datetimeFigureOut">
               <a:rPr lang="pt-BR" smtClean="0"/>
-              <a:t>06/04/2026</a:t>
+              <a:t>07/04/2026</a:t>
             </a:fld>
             <a:endParaRPr lang="pt-BR"/>
           </a:p>
@@ -2385,7 +2390,7 @@
           <a:p>
             <a:fld id="{E568B946-2B74-4A25-A991-D91986269CF7}" type="datetimeFigureOut">
               <a:rPr lang="pt-BR" smtClean="0"/>
-              <a:t>06/04/2026</a:t>
+              <a:t>07/04/2026</a:t>
             </a:fld>
             <a:endParaRPr lang="pt-BR"/>
           </a:p>
@@ -2673,7 +2678,7 @@
           <a:p>
             <a:fld id="{E568B946-2B74-4A25-A991-D91986269CF7}" type="datetimeFigureOut">
               <a:rPr lang="pt-BR" smtClean="0"/>
-              <a:t>06/04/2026</a:t>
+              <a:t>07/04/2026</a:t>
             </a:fld>
             <a:endParaRPr lang="pt-BR"/>
           </a:p>
@@ -2914,7 +2919,7 @@
           <a:p>
             <a:fld id="{E568B946-2B74-4A25-A991-D91986269CF7}" type="datetimeFigureOut">
               <a:rPr lang="pt-BR" smtClean="0"/>
-              <a:t>06/04/2026</a:t>
+              <a:t>07/04/2026</a:t>
             </a:fld>
             <a:endParaRPr lang="pt-BR"/>
           </a:p>
@@ -3354,7 +3359,7 @@
           <a:p>
             <a:r>
               <a:rPr lang="pt-BR" dirty="0"/>
-              <a:t>Aula 07</a:t>
+              <a:t>Aula 06</a:t>
             </a:r>
           </a:p>
         </p:txBody>
@@ -4927,683 +4932,1264 @@
           </a:bodyPr>
           <a:lstStyle/>
           <a:p>
-            <a:pPr algn="l">
+            <a:pPr marL="0" marR="0" lvl="0" indent="0" algn="l" defTabSz="914400" rtl="0" eaLnBrk="1" fontAlgn="auto" latinLnBrk="0" hangingPunct="1">
               <a:lnSpc>
                 <a:spcPts val="2813"/>
               </a:lnSpc>
-              <a:buNone/>
-            </a:pPr>
-            <a:r>
-              <a:rPr lang="pt-BR" b="0" i="0" dirty="0">
+              <a:spcBef>
+                <a:spcPts val="0"/>
+              </a:spcBef>
+              <a:spcAft>
+                <a:spcPts val="0"/>
+              </a:spcAft>
+              <a:buClrTx/>
+              <a:buSzTx/>
+              <a:buFontTx/>
+              <a:buNone/>
+              <a:tabLst/>
+              <a:defRPr/>
+            </a:pPr>
+            <a:r>
+              <a:rPr kumimoji="0" lang="pt-BR" sz="1800" b="0" i="0" u="none" strike="noStrike" kern="1200" cap="none" spc="0" normalizeH="0" baseline="0" noProof="0" dirty="0">
+                <a:ln>
+                  <a:noFill/>
+                </a:ln>
                 <a:solidFill>
                   <a:srgbClr val="D81B60"/>
                 </a:solidFill>
                 <a:effectLst/>
-                <a:latin typeface="Roboto Mono" pitchFamily="2" charset="0"/>
+                <a:uLnTx/>
+                <a:uFillTx/>
+                <a:latin typeface="Roboto Mono" pitchFamily="2" charset="0"/>
+                <a:ea typeface="+mn-ea"/>
+                <a:cs typeface="+mn-cs"/>
               </a:rPr>
               <a:t># Criando variáveis simples</a:t>
             </a:r>
-            <a:endParaRPr lang="pt-BR" b="0" i="0" dirty="0">
+            <a:endParaRPr kumimoji="0" lang="pt-BR" sz="1800" b="0" i="0" u="none" strike="noStrike" kern="1200" cap="none" spc="0" normalizeH="0" baseline="0" noProof="0" dirty="0">
+              <a:ln>
+                <a:noFill/>
+              </a:ln>
               <a:solidFill>
                 <a:srgbClr val="000000"/>
               </a:solidFill>
               <a:effectLst/>
+              <a:uLnTx/>
+              <a:uFillTx/>
               <a:latin typeface="Roboto Mono" pitchFamily="2" charset="0"/>
+              <a:ea typeface="+mn-ea"/>
+              <a:cs typeface="+mn-cs"/>
             </a:endParaRPr>
           </a:p>
           <a:p>
-            <a:pPr algn="l">
+            <a:pPr marL="0" marR="0" lvl="0" indent="0" algn="l" defTabSz="914400" rtl="0" eaLnBrk="1" fontAlgn="auto" latinLnBrk="0" hangingPunct="1">
               <a:lnSpc>
                 <a:spcPts val="2813"/>
               </a:lnSpc>
-              <a:buNone/>
-            </a:pPr>
-            <a:r>
-              <a:rPr lang="pt-BR" b="0" i="0" dirty="0">
+              <a:spcBef>
+                <a:spcPts val="0"/>
+              </a:spcBef>
+              <a:spcAft>
+                <a:spcPts val="0"/>
+              </a:spcAft>
+              <a:buClrTx/>
+              <a:buSzTx/>
+              <a:buFontTx/>
+              <a:buNone/>
+              <a:tabLst/>
+              <a:defRPr/>
+            </a:pPr>
+            <a:r>
+              <a:rPr kumimoji="0" lang="pt-BR" sz="1800" b="0" i="0" u="none" strike="noStrike" kern="1200" cap="none" spc="0" normalizeH="0" baseline="0" noProof="0" dirty="0">
+                <a:ln>
+                  <a:noFill/>
+                </a:ln>
                 <a:solidFill>
                   <a:srgbClr val="37474F"/>
                 </a:solidFill>
                 <a:effectLst/>
-                <a:latin typeface="Roboto Mono" pitchFamily="2" charset="0"/>
+                <a:uLnTx/>
+                <a:uFillTx/>
+                <a:latin typeface="Roboto Mono" pitchFamily="2" charset="0"/>
+                <a:ea typeface="+mn-ea"/>
+                <a:cs typeface="+mn-cs"/>
               </a:rPr>
               <a:t>aluno0 </a:t>
             </a:r>
             <a:r>
-              <a:rPr lang="pt-BR" b="0" i="0" dirty="0">
+              <a:rPr kumimoji="0" lang="pt-BR" sz="1800" b="0" i="0" u="none" strike="noStrike" kern="1200" cap="none" spc="0" normalizeH="0" baseline="0" noProof="0" dirty="0">
+                <a:ln>
+                  <a:noFill/>
+                </a:ln>
                 <a:solidFill>
                   <a:srgbClr val="3F51B5"/>
                 </a:solidFill>
                 <a:effectLst/>
-                <a:latin typeface="Roboto Mono" pitchFamily="2" charset="0"/>
+                <a:uLnTx/>
+                <a:uFillTx/>
+                <a:latin typeface="Roboto Mono" pitchFamily="2" charset="0"/>
+                <a:ea typeface="+mn-ea"/>
+                <a:cs typeface="+mn-cs"/>
               </a:rPr>
               <a:t>=</a:t>
             </a:r>
             <a:r>
-              <a:rPr lang="pt-BR" b="0" i="0" dirty="0">
+              <a:rPr kumimoji="0" lang="pt-BR" sz="1800" b="0" i="0" u="none" strike="noStrike" kern="1200" cap="none" spc="0" normalizeH="0" baseline="0" noProof="0" dirty="0">
+                <a:ln>
+                  <a:noFill/>
+                </a:ln>
                 <a:solidFill>
                   <a:srgbClr val="388E3C"/>
                 </a:solidFill>
                 <a:effectLst/>
-                <a:latin typeface="Roboto Mono" pitchFamily="2" charset="0"/>
+                <a:uLnTx/>
+                <a:uFillTx/>
+                <a:latin typeface="Roboto Mono" pitchFamily="2" charset="0"/>
+                <a:ea typeface="+mn-ea"/>
+                <a:cs typeface="+mn-cs"/>
               </a:rPr>
               <a:t> "Ana"</a:t>
             </a:r>
-            <a:endParaRPr lang="pt-BR" b="0" i="0" dirty="0">
+            <a:endParaRPr kumimoji="0" lang="pt-BR" sz="1800" b="0" i="0" u="none" strike="noStrike" kern="1200" cap="none" spc="0" normalizeH="0" baseline="0" noProof="0" dirty="0">
+              <a:ln>
+                <a:noFill/>
+              </a:ln>
               <a:solidFill>
                 <a:srgbClr val="000000"/>
               </a:solidFill>
               <a:effectLst/>
+              <a:uLnTx/>
+              <a:uFillTx/>
               <a:latin typeface="Roboto Mono" pitchFamily="2" charset="0"/>
+              <a:ea typeface="+mn-ea"/>
+              <a:cs typeface="+mn-cs"/>
             </a:endParaRPr>
           </a:p>
           <a:p>
-            <a:pPr algn="l">
+            <a:pPr marL="0" marR="0" lvl="0" indent="0" algn="l" defTabSz="914400" rtl="0" eaLnBrk="1" fontAlgn="auto" latinLnBrk="0" hangingPunct="1">
               <a:lnSpc>
                 <a:spcPts val="2813"/>
               </a:lnSpc>
-              <a:buNone/>
-            </a:pPr>
-            <a:r>
-              <a:rPr lang="pt-BR" b="0" i="0" dirty="0">
+              <a:spcBef>
+                <a:spcPts val="0"/>
+              </a:spcBef>
+              <a:spcAft>
+                <a:spcPts val="0"/>
+              </a:spcAft>
+              <a:buClrTx/>
+              <a:buSzTx/>
+              <a:buFontTx/>
+              <a:buNone/>
+              <a:tabLst/>
+              <a:defRPr/>
+            </a:pPr>
+            <a:r>
+              <a:rPr kumimoji="0" lang="pt-BR" sz="1800" b="0" i="0" u="none" strike="noStrike" kern="1200" cap="none" spc="0" normalizeH="0" baseline="0" noProof="0" dirty="0">
+                <a:ln>
+                  <a:noFill/>
+                </a:ln>
                 <a:solidFill>
                   <a:srgbClr val="37474F"/>
                 </a:solidFill>
                 <a:effectLst/>
-                <a:latin typeface="Roboto Mono" pitchFamily="2" charset="0"/>
+                <a:uLnTx/>
+                <a:uFillTx/>
+                <a:latin typeface="Roboto Mono" pitchFamily="2" charset="0"/>
+                <a:ea typeface="+mn-ea"/>
+                <a:cs typeface="+mn-cs"/>
               </a:rPr>
               <a:t>aluno1 </a:t>
             </a:r>
             <a:r>
-              <a:rPr lang="pt-BR" b="0" i="0" dirty="0">
+              <a:rPr kumimoji="0" lang="pt-BR" sz="1800" b="0" i="0" u="none" strike="noStrike" kern="1200" cap="none" spc="0" normalizeH="0" baseline="0" noProof="0" dirty="0">
+                <a:ln>
+                  <a:noFill/>
+                </a:ln>
                 <a:solidFill>
                   <a:srgbClr val="3F51B5"/>
                 </a:solidFill>
                 <a:effectLst/>
-                <a:latin typeface="Roboto Mono" pitchFamily="2" charset="0"/>
+                <a:uLnTx/>
+                <a:uFillTx/>
+                <a:latin typeface="Roboto Mono" pitchFamily="2" charset="0"/>
+                <a:ea typeface="+mn-ea"/>
+                <a:cs typeface="+mn-cs"/>
               </a:rPr>
               <a:t>=</a:t>
             </a:r>
             <a:r>
-              <a:rPr lang="pt-BR" b="0" i="0" dirty="0">
+              <a:rPr kumimoji="0" lang="pt-BR" sz="1800" b="0" i="0" u="none" strike="noStrike" kern="1200" cap="none" spc="0" normalizeH="0" baseline="0" noProof="0" dirty="0">
+                <a:ln>
+                  <a:noFill/>
+                </a:ln>
                 <a:solidFill>
                   <a:srgbClr val="388E3C"/>
                 </a:solidFill>
                 <a:effectLst/>
-                <a:latin typeface="Roboto Mono" pitchFamily="2" charset="0"/>
+                <a:uLnTx/>
+                <a:uFillTx/>
+                <a:latin typeface="Roboto Mono" pitchFamily="2" charset="0"/>
+                <a:ea typeface="+mn-ea"/>
+                <a:cs typeface="+mn-cs"/>
               </a:rPr>
               <a:t> "Bruno"</a:t>
             </a:r>
-            <a:endParaRPr lang="pt-BR" b="0" i="0" dirty="0">
+            <a:endParaRPr kumimoji="0" lang="pt-BR" sz="1800" b="0" i="0" u="none" strike="noStrike" kern="1200" cap="none" spc="0" normalizeH="0" baseline="0" noProof="0" dirty="0">
+              <a:ln>
+                <a:noFill/>
+              </a:ln>
               <a:solidFill>
                 <a:srgbClr val="000000"/>
               </a:solidFill>
               <a:effectLst/>
+              <a:uLnTx/>
+              <a:uFillTx/>
               <a:latin typeface="Roboto Mono" pitchFamily="2" charset="0"/>
+              <a:ea typeface="+mn-ea"/>
+              <a:cs typeface="+mn-cs"/>
             </a:endParaRPr>
           </a:p>
           <a:p>
-            <a:pPr algn="l">
+            <a:pPr marL="0" marR="0" lvl="0" indent="0" algn="l" defTabSz="914400" rtl="0" eaLnBrk="1" fontAlgn="auto" latinLnBrk="0" hangingPunct="1">
               <a:lnSpc>
                 <a:spcPts val="2813"/>
               </a:lnSpc>
-              <a:buNone/>
-            </a:pPr>
-            <a:r>
-              <a:rPr lang="pt-BR" b="0" i="0" dirty="0">
+              <a:spcBef>
+                <a:spcPts val="0"/>
+              </a:spcBef>
+              <a:spcAft>
+                <a:spcPts val="0"/>
+              </a:spcAft>
+              <a:buClrTx/>
+              <a:buSzTx/>
+              <a:buFontTx/>
+              <a:buNone/>
+              <a:tabLst/>
+              <a:defRPr/>
+            </a:pPr>
+            <a:r>
+              <a:rPr kumimoji="0" lang="pt-BR" sz="1800" b="0" i="0" u="none" strike="noStrike" kern="1200" cap="none" spc="0" normalizeH="0" baseline="0" noProof="0" dirty="0">
+                <a:ln>
+                  <a:noFill/>
+                </a:ln>
                 <a:solidFill>
                   <a:srgbClr val="37474F"/>
                 </a:solidFill>
                 <a:effectLst/>
-                <a:latin typeface="Roboto Mono" pitchFamily="2" charset="0"/>
+                <a:uLnTx/>
+                <a:uFillTx/>
+                <a:latin typeface="Roboto Mono" pitchFamily="2" charset="0"/>
+                <a:ea typeface="+mn-ea"/>
+                <a:cs typeface="+mn-cs"/>
               </a:rPr>
               <a:t>aluno2 </a:t>
             </a:r>
             <a:r>
-              <a:rPr lang="pt-BR" b="0" i="0" dirty="0">
+              <a:rPr kumimoji="0" lang="pt-BR" sz="1800" b="0" i="0" u="none" strike="noStrike" kern="1200" cap="none" spc="0" normalizeH="0" baseline="0" noProof="0" dirty="0">
+                <a:ln>
+                  <a:noFill/>
+                </a:ln>
                 <a:solidFill>
                   <a:srgbClr val="3F51B5"/>
                 </a:solidFill>
                 <a:effectLst/>
-                <a:latin typeface="Roboto Mono" pitchFamily="2" charset="0"/>
+                <a:uLnTx/>
+                <a:uFillTx/>
+                <a:latin typeface="Roboto Mono" pitchFamily="2" charset="0"/>
+                <a:ea typeface="+mn-ea"/>
+                <a:cs typeface="+mn-cs"/>
               </a:rPr>
               <a:t>=</a:t>
             </a:r>
             <a:r>
-              <a:rPr lang="pt-BR" b="0" i="0" dirty="0">
+              <a:rPr kumimoji="0" lang="pt-BR" sz="1800" b="0" i="0" u="none" strike="noStrike" kern="1200" cap="none" spc="0" normalizeH="0" baseline="0" noProof="0" dirty="0">
+                <a:ln>
+                  <a:noFill/>
+                </a:ln>
                 <a:solidFill>
                   <a:srgbClr val="388E3C"/>
                 </a:solidFill>
                 <a:effectLst/>
-                <a:latin typeface="Roboto Mono" pitchFamily="2" charset="0"/>
+                <a:uLnTx/>
+                <a:uFillTx/>
+                <a:latin typeface="Roboto Mono" pitchFamily="2" charset="0"/>
+                <a:ea typeface="+mn-ea"/>
+                <a:cs typeface="+mn-cs"/>
               </a:rPr>
               <a:t> "Carlos"</a:t>
             </a:r>
-            <a:endParaRPr lang="pt-BR" b="0" i="0" dirty="0">
+            <a:endParaRPr kumimoji="0" lang="pt-BR" sz="1800" b="0" i="0" u="none" strike="noStrike" kern="1200" cap="none" spc="0" normalizeH="0" baseline="0" noProof="0" dirty="0">
+              <a:ln>
+                <a:noFill/>
+              </a:ln>
               <a:solidFill>
                 <a:srgbClr val="000000"/>
               </a:solidFill>
               <a:effectLst/>
+              <a:uLnTx/>
+              <a:uFillTx/>
               <a:latin typeface="Roboto Mono" pitchFamily="2" charset="0"/>
+              <a:ea typeface="+mn-ea"/>
+              <a:cs typeface="+mn-cs"/>
             </a:endParaRPr>
           </a:p>
           <a:p>
-            <a:pPr algn="l">
+            <a:pPr marL="0" marR="0" lvl="0" indent="0" algn="l" defTabSz="914400" rtl="0" eaLnBrk="1" fontAlgn="auto" latinLnBrk="0" hangingPunct="1">
               <a:lnSpc>
                 <a:spcPts val="2813"/>
               </a:lnSpc>
-              <a:buNone/>
-            </a:pPr>
-            <a:endParaRPr lang="pt-BR" b="0" i="0" dirty="0">
+              <a:spcBef>
+                <a:spcPts val="0"/>
+              </a:spcBef>
+              <a:spcAft>
+                <a:spcPts val="0"/>
+              </a:spcAft>
+              <a:buClrTx/>
+              <a:buSzTx/>
+              <a:buFontTx/>
+              <a:buNone/>
+              <a:tabLst/>
+              <a:defRPr/>
+            </a:pPr>
+            <a:endParaRPr kumimoji="0" lang="pt-BR" sz="1800" b="0" i="0" u="none" strike="noStrike" kern="1200" cap="none" spc="0" normalizeH="0" baseline="0" noProof="0" dirty="0">
+              <a:ln>
+                <a:noFill/>
+              </a:ln>
               <a:solidFill>
                 <a:srgbClr val="000000"/>
               </a:solidFill>
               <a:effectLst/>
+              <a:uLnTx/>
+              <a:uFillTx/>
               <a:latin typeface="Roboto Mono" pitchFamily="2" charset="0"/>
+              <a:ea typeface="+mn-ea"/>
+              <a:cs typeface="+mn-cs"/>
             </a:endParaRPr>
           </a:p>
           <a:p>
-            <a:pPr algn="l">
+            <a:pPr marL="0" marR="0" lvl="0" indent="0" algn="l" defTabSz="914400" rtl="0" eaLnBrk="1" fontAlgn="auto" latinLnBrk="0" hangingPunct="1">
               <a:lnSpc>
                 <a:spcPts val="2813"/>
               </a:lnSpc>
-              <a:buNone/>
-            </a:pPr>
-            <a:r>
-              <a:rPr lang="pt-BR" b="0" i="0" dirty="0">
+              <a:spcBef>
+                <a:spcPts val="0"/>
+              </a:spcBef>
+              <a:spcAft>
+                <a:spcPts val="0"/>
+              </a:spcAft>
+              <a:buClrTx/>
+              <a:buSzTx/>
+              <a:buFontTx/>
+              <a:buNone/>
+              <a:tabLst/>
+              <a:defRPr/>
+            </a:pPr>
+            <a:r>
+              <a:rPr kumimoji="0" lang="pt-BR" sz="1800" b="0" i="0" u="none" strike="noStrike" kern="1200" cap="none" spc="0" normalizeH="0" baseline="0" noProof="0" dirty="0">
+                <a:ln>
+                  <a:noFill/>
+                </a:ln>
                 <a:solidFill>
                   <a:srgbClr val="D81B60"/>
                 </a:solidFill>
                 <a:effectLst/>
-                <a:latin typeface="Roboto Mono" pitchFamily="2" charset="0"/>
+                <a:uLnTx/>
+                <a:uFillTx/>
+                <a:latin typeface="Roboto Mono" pitchFamily="2" charset="0"/>
+                <a:ea typeface="+mn-ea"/>
+                <a:cs typeface="+mn-cs"/>
               </a:rPr>
               <a:t># "Adicionando" um novo aluno </a:t>
             </a:r>
-            <a:endParaRPr lang="pt-BR" b="0" i="0" dirty="0">
+            <a:endParaRPr kumimoji="0" lang="pt-BR" sz="1800" b="0" i="0" u="none" strike="noStrike" kern="1200" cap="none" spc="0" normalizeH="0" baseline="0" noProof="0" dirty="0">
+              <a:ln>
+                <a:noFill/>
+              </a:ln>
               <a:solidFill>
                 <a:srgbClr val="000000"/>
               </a:solidFill>
               <a:effectLst/>
+              <a:uLnTx/>
+              <a:uFillTx/>
               <a:latin typeface="Roboto Mono" pitchFamily="2" charset="0"/>
+              <a:ea typeface="+mn-ea"/>
+              <a:cs typeface="+mn-cs"/>
             </a:endParaRPr>
           </a:p>
           <a:p>
-            <a:pPr algn="l">
+            <a:pPr marL="0" marR="0" lvl="0" indent="0" algn="l" defTabSz="914400" rtl="0" eaLnBrk="1" fontAlgn="auto" latinLnBrk="0" hangingPunct="1">
               <a:lnSpc>
                 <a:spcPts val="2813"/>
               </a:lnSpc>
-              <a:buNone/>
-            </a:pPr>
-            <a:r>
-              <a:rPr lang="pt-BR" b="0" i="0" dirty="0">
+              <a:spcBef>
+                <a:spcPts val="0"/>
+              </a:spcBef>
+              <a:spcAft>
+                <a:spcPts val="0"/>
+              </a:spcAft>
+              <a:buClrTx/>
+              <a:buSzTx/>
+              <a:buFontTx/>
+              <a:buNone/>
+              <a:tabLst/>
+              <a:defRPr/>
+            </a:pPr>
+            <a:r>
+              <a:rPr kumimoji="0" lang="pt-BR" sz="1800" b="0" i="0" u="none" strike="noStrike" kern="1200" cap="none" spc="0" normalizeH="0" baseline="0" noProof="0" dirty="0">
+                <a:ln>
+                  <a:noFill/>
+                </a:ln>
                 <a:solidFill>
                   <a:srgbClr val="D81B60"/>
                 </a:solidFill>
                 <a:effectLst/>
-                <a:latin typeface="Roboto Mono" pitchFamily="2" charset="0"/>
+                <a:uLnTx/>
+                <a:uFillTx/>
+                <a:latin typeface="Roboto Mono" pitchFamily="2" charset="0"/>
+                <a:ea typeface="+mn-ea"/>
+                <a:cs typeface="+mn-cs"/>
               </a:rPr>
               <a:t># (precisamos criar nova variável )</a:t>
             </a:r>
-            <a:endParaRPr lang="pt-BR" b="0" i="0" dirty="0">
+            <a:endParaRPr kumimoji="0" lang="pt-BR" sz="1800" b="0" i="0" u="none" strike="noStrike" kern="1200" cap="none" spc="0" normalizeH="0" baseline="0" noProof="0" dirty="0">
+              <a:ln>
+                <a:noFill/>
+              </a:ln>
               <a:solidFill>
                 <a:srgbClr val="000000"/>
               </a:solidFill>
               <a:effectLst/>
+              <a:uLnTx/>
+              <a:uFillTx/>
               <a:latin typeface="Roboto Mono" pitchFamily="2" charset="0"/>
+              <a:ea typeface="+mn-ea"/>
+              <a:cs typeface="+mn-cs"/>
             </a:endParaRPr>
           </a:p>
           <a:p>
-            <a:pPr algn="l">
+            <a:pPr marL="0" marR="0" lvl="0" indent="0" algn="l" defTabSz="914400" rtl="0" eaLnBrk="1" fontAlgn="auto" latinLnBrk="0" hangingPunct="1">
               <a:lnSpc>
                 <a:spcPts val="2813"/>
               </a:lnSpc>
-              <a:buNone/>
-            </a:pPr>
-            <a:r>
-              <a:rPr lang="pt-BR" b="0" i="0" dirty="0">
+              <a:spcBef>
+                <a:spcPts val="0"/>
+              </a:spcBef>
+              <a:spcAft>
+                <a:spcPts val="0"/>
+              </a:spcAft>
+              <a:buClrTx/>
+              <a:buSzTx/>
+              <a:buFontTx/>
+              <a:buNone/>
+              <a:tabLst/>
+              <a:defRPr/>
+            </a:pPr>
+            <a:r>
+              <a:rPr kumimoji="0" lang="pt-BR" sz="1800" b="0" i="0" u="none" strike="noStrike" kern="1200" cap="none" spc="0" normalizeH="0" baseline="0" noProof="0" dirty="0">
+                <a:ln>
+                  <a:noFill/>
+                </a:ln>
                 <a:solidFill>
                   <a:srgbClr val="37474F"/>
                 </a:solidFill>
                 <a:effectLst/>
-                <a:latin typeface="Roboto Mono" pitchFamily="2" charset="0"/>
+                <a:uLnTx/>
+                <a:uFillTx/>
+                <a:latin typeface="Roboto Mono" pitchFamily="2" charset="0"/>
+                <a:ea typeface="+mn-ea"/>
+                <a:cs typeface="+mn-cs"/>
               </a:rPr>
               <a:t>aluno3 </a:t>
             </a:r>
             <a:r>
-              <a:rPr lang="pt-BR" b="0" i="0" dirty="0">
+              <a:rPr kumimoji="0" lang="pt-BR" sz="1800" b="0" i="0" u="none" strike="noStrike" kern="1200" cap="none" spc="0" normalizeH="0" baseline="0" noProof="0" dirty="0">
+                <a:ln>
+                  <a:noFill/>
+                </a:ln>
                 <a:solidFill>
                   <a:srgbClr val="3F51B5"/>
                 </a:solidFill>
                 <a:effectLst/>
-                <a:latin typeface="Roboto Mono" pitchFamily="2" charset="0"/>
+                <a:uLnTx/>
+                <a:uFillTx/>
+                <a:latin typeface="Roboto Mono" pitchFamily="2" charset="0"/>
+                <a:ea typeface="+mn-ea"/>
+                <a:cs typeface="+mn-cs"/>
               </a:rPr>
               <a:t>=</a:t>
             </a:r>
             <a:r>
-              <a:rPr lang="pt-BR" b="0" i="0" dirty="0">
+              <a:rPr kumimoji="0" lang="pt-BR" sz="1800" b="0" i="0" u="none" strike="noStrike" kern="1200" cap="none" spc="0" normalizeH="0" baseline="0" noProof="0" dirty="0">
+                <a:ln>
+                  <a:noFill/>
+                </a:ln>
                 <a:solidFill>
                   <a:srgbClr val="388E3C"/>
                 </a:solidFill>
                 <a:effectLst/>
-                <a:latin typeface="Roboto Mono" pitchFamily="2" charset="0"/>
+                <a:uLnTx/>
+                <a:uFillTx/>
+                <a:latin typeface="Roboto Mono" pitchFamily="2" charset="0"/>
+                <a:ea typeface="+mn-ea"/>
+                <a:cs typeface="+mn-cs"/>
               </a:rPr>
               <a:t> "Daniela"</a:t>
             </a:r>
-            <a:endParaRPr lang="pt-BR" b="0" i="0" dirty="0">
+            <a:endParaRPr kumimoji="0" lang="pt-BR" sz="1800" b="0" i="0" u="none" strike="noStrike" kern="1200" cap="none" spc="0" normalizeH="0" baseline="0" noProof="0" dirty="0">
+              <a:ln>
+                <a:noFill/>
+              </a:ln>
               <a:solidFill>
                 <a:srgbClr val="000000"/>
               </a:solidFill>
               <a:effectLst/>
+              <a:uLnTx/>
+              <a:uFillTx/>
               <a:latin typeface="Roboto Mono" pitchFamily="2" charset="0"/>
+              <a:ea typeface="+mn-ea"/>
+              <a:cs typeface="+mn-cs"/>
             </a:endParaRPr>
           </a:p>
           <a:p>
-            <a:pPr algn="l">
+            <a:pPr marL="0" marR="0" lvl="0" indent="0" algn="l" defTabSz="914400" rtl="0" eaLnBrk="1" fontAlgn="auto" latinLnBrk="0" hangingPunct="1">
               <a:lnSpc>
                 <a:spcPts val="2813"/>
               </a:lnSpc>
-              <a:buNone/>
-            </a:pPr>
-            <a:endParaRPr lang="pt-BR" b="0" i="0" dirty="0">
+              <a:spcBef>
+                <a:spcPts val="0"/>
+              </a:spcBef>
+              <a:spcAft>
+                <a:spcPts val="0"/>
+              </a:spcAft>
+              <a:buClrTx/>
+              <a:buSzTx/>
+              <a:buFontTx/>
+              <a:buNone/>
+              <a:tabLst/>
+              <a:defRPr/>
+            </a:pPr>
+            <a:endParaRPr kumimoji="0" lang="pt-BR" sz="1800" b="0" i="0" u="none" strike="noStrike" kern="1200" cap="none" spc="0" normalizeH="0" baseline="0" noProof="0" dirty="0">
+              <a:ln>
+                <a:noFill/>
+              </a:ln>
               <a:solidFill>
                 <a:srgbClr val="000000"/>
               </a:solidFill>
               <a:effectLst/>
+              <a:uLnTx/>
+              <a:uFillTx/>
               <a:latin typeface="Roboto Mono" pitchFamily="2" charset="0"/>
+              <a:ea typeface="+mn-ea"/>
+              <a:cs typeface="+mn-cs"/>
             </a:endParaRPr>
           </a:p>
           <a:p>
-            <a:pPr algn="l">
+            <a:pPr marL="0" marR="0" lvl="0" indent="0" algn="l" defTabSz="914400" rtl="0" eaLnBrk="1" fontAlgn="auto" latinLnBrk="0" hangingPunct="1">
               <a:lnSpc>
                 <a:spcPts val="2813"/>
               </a:lnSpc>
-              <a:buNone/>
-            </a:pPr>
-            <a:r>
-              <a:rPr lang="pt-BR" b="0" i="0" dirty="0">
+              <a:spcBef>
+                <a:spcPts val="0"/>
+              </a:spcBef>
+              <a:spcAft>
+                <a:spcPts val="0"/>
+              </a:spcAft>
+              <a:buClrTx/>
+              <a:buSzTx/>
+              <a:buFontTx/>
+              <a:buNone/>
+              <a:tabLst/>
+              <a:defRPr/>
+            </a:pPr>
+            <a:r>
+              <a:rPr kumimoji="0" lang="pt-BR" sz="1800" b="0" i="0" u="none" strike="noStrike" kern="1200" cap="none" spc="0" normalizeH="0" baseline="0" noProof="0" dirty="0">
+                <a:ln>
+                  <a:noFill/>
+                </a:ln>
                 <a:solidFill>
                   <a:srgbClr val="D81B60"/>
                 </a:solidFill>
                 <a:effectLst/>
-                <a:latin typeface="Roboto Mono" pitchFamily="2" charset="0"/>
+                <a:uLnTx/>
+                <a:uFillTx/>
+                <a:latin typeface="Roboto Mono" pitchFamily="2" charset="0"/>
+                <a:ea typeface="+mn-ea"/>
+                <a:cs typeface="+mn-cs"/>
               </a:rPr>
               <a:t># Acessando o dado </a:t>
             </a:r>
-            <a:endParaRPr lang="pt-BR" b="0" i="0" dirty="0">
+            <a:endParaRPr kumimoji="0" lang="pt-BR" sz="1800" b="0" i="0" u="none" strike="noStrike" kern="1200" cap="none" spc="0" normalizeH="0" baseline="0" noProof="0" dirty="0">
+              <a:ln>
+                <a:noFill/>
+              </a:ln>
               <a:solidFill>
                 <a:srgbClr val="000000"/>
               </a:solidFill>
               <a:effectLst/>
+              <a:uLnTx/>
+              <a:uFillTx/>
               <a:latin typeface="Roboto Mono" pitchFamily="2" charset="0"/>
+              <a:ea typeface="+mn-ea"/>
+              <a:cs typeface="+mn-cs"/>
             </a:endParaRPr>
           </a:p>
           <a:p>
-            <a:pPr algn="l">
+            <a:pPr marL="0" marR="0" lvl="0" indent="0" algn="l" defTabSz="914400" rtl="0" eaLnBrk="1" fontAlgn="auto" latinLnBrk="0" hangingPunct="1">
               <a:lnSpc>
                 <a:spcPts val="2813"/>
               </a:lnSpc>
-              <a:buNone/>
-            </a:pPr>
-            <a:r>
-              <a:rPr lang="pt-BR" b="0" i="0" dirty="0">
+              <a:spcBef>
+                <a:spcPts val="0"/>
+              </a:spcBef>
+              <a:spcAft>
+                <a:spcPts val="0"/>
+              </a:spcAft>
+              <a:buClrTx/>
+              <a:buSzTx/>
+              <a:buFontTx/>
+              <a:buNone/>
+              <a:tabLst/>
+              <a:defRPr/>
+            </a:pPr>
+            <a:r>
+              <a:rPr kumimoji="0" lang="pt-BR" sz="1800" b="0" i="0" u="none" strike="noStrike" kern="1200" cap="none" spc="0" normalizeH="0" baseline="0" noProof="0" dirty="0">
+                <a:ln>
+                  <a:noFill/>
+                </a:ln>
                 <a:solidFill>
                   <a:srgbClr val="37474F"/>
                 </a:solidFill>
                 <a:effectLst/>
-                <a:latin typeface="Roboto Mono" pitchFamily="2" charset="0"/>
+                <a:uLnTx/>
+                <a:uFillTx/>
+                <a:latin typeface="Roboto Mono" pitchFamily="2" charset="0"/>
+                <a:ea typeface="+mn-ea"/>
+                <a:cs typeface="+mn-cs"/>
               </a:rPr>
               <a:t>print(</a:t>
             </a:r>
             <a:r>
-              <a:rPr lang="pt-BR" b="0" i="0" dirty="0" err="1">
+              <a:rPr kumimoji="0" lang="pt-BR" sz="1800" b="0" i="0" u="none" strike="noStrike" kern="1200" cap="none" spc="0" normalizeH="0" baseline="0" noProof="0" dirty="0" err="1">
+                <a:ln>
+                  <a:noFill/>
+                </a:ln>
                 <a:solidFill>
                   <a:srgbClr val="3F51B5"/>
                 </a:solidFill>
                 <a:effectLst/>
-                <a:latin typeface="Roboto Mono" pitchFamily="2" charset="0"/>
+                <a:uLnTx/>
+                <a:uFillTx/>
+                <a:latin typeface="Roboto Mono" pitchFamily="2" charset="0"/>
+                <a:ea typeface="+mn-ea"/>
+                <a:cs typeface="+mn-cs"/>
               </a:rPr>
               <a:t>f</a:t>
             </a:r>
             <a:r>
-              <a:rPr lang="pt-BR" b="0" i="0" dirty="0" err="1">
+              <a:rPr kumimoji="0" lang="pt-BR" sz="1800" b="0" i="0" u="none" strike="noStrike" kern="1200" cap="none" spc="0" normalizeH="0" baseline="0" noProof="0" dirty="0" err="1">
+                <a:ln>
+                  <a:noFill/>
+                </a:ln>
                 <a:solidFill>
                   <a:srgbClr val="388E3C"/>
                 </a:solidFill>
                 <a:effectLst/>
-                <a:latin typeface="Roboto Mono" pitchFamily="2" charset="0"/>
+                <a:uLnTx/>
+                <a:uFillTx/>
+                <a:latin typeface="Roboto Mono" pitchFamily="2" charset="0"/>
+                <a:ea typeface="+mn-ea"/>
+                <a:cs typeface="+mn-cs"/>
               </a:rPr>
               <a:t>"O</a:t>
             </a:r>
             <a:r>
-              <a:rPr lang="pt-BR" b="0" i="0" dirty="0">
+              <a:rPr kumimoji="0" lang="pt-BR" sz="1800" b="0" i="0" u="none" strike="noStrike" kern="1200" cap="none" spc="0" normalizeH="0" baseline="0" noProof="0" dirty="0">
+                <a:ln>
+                  <a:noFill/>
+                </a:ln>
                 <a:solidFill>
                   <a:srgbClr val="388E3C"/>
                 </a:solidFill>
                 <a:effectLst/>
-                <a:latin typeface="Roboto Mono" pitchFamily="2" charset="0"/>
+                <a:uLnTx/>
+                <a:uFillTx/>
+                <a:latin typeface="Roboto Mono" pitchFamily="2" charset="0"/>
+                <a:ea typeface="+mn-ea"/>
+                <a:cs typeface="+mn-cs"/>
               </a:rPr>
               <a:t> primeiro aluno é: </a:t>
             </a:r>
             <a:r>
-              <a:rPr lang="pt-BR" b="0" i="0" dirty="0">
+              <a:rPr kumimoji="0" lang="pt-BR" sz="1800" b="0" i="0" u="none" strike="noStrike" kern="1200" cap="none" spc="0" normalizeH="0" baseline="0" noProof="0" dirty="0">
+                <a:ln>
+                  <a:noFill/>
+                </a:ln>
                 <a:solidFill>
                   <a:srgbClr val="C53929"/>
                 </a:solidFill>
                 <a:effectLst/>
-                <a:latin typeface="Roboto Mono" pitchFamily="2" charset="0"/>
+                <a:uLnTx/>
+                <a:uFillTx/>
+                <a:latin typeface="Roboto Mono" pitchFamily="2" charset="0"/>
+                <a:ea typeface="+mn-ea"/>
+                <a:cs typeface="+mn-cs"/>
               </a:rPr>
               <a:t>{</a:t>
             </a:r>
             <a:r>
-              <a:rPr lang="pt-BR" b="0" i="0" dirty="0">
+              <a:rPr kumimoji="0" lang="pt-BR" sz="1800" b="0" i="0" u="none" strike="noStrike" kern="1200" cap="none" spc="0" normalizeH="0" baseline="0" noProof="0" dirty="0">
+                <a:ln>
+                  <a:noFill/>
+                </a:ln>
                 <a:solidFill>
                   <a:srgbClr val="37474F"/>
                 </a:solidFill>
                 <a:effectLst/>
-                <a:latin typeface="Roboto Mono" pitchFamily="2" charset="0"/>
+                <a:uLnTx/>
+                <a:uFillTx/>
+                <a:latin typeface="Roboto Mono" pitchFamily="2" charset="0"/>
+                <a:ea typeface="+mn-ea"/>
+                <a:cs typeface="+mn-cs"/>
               </a:rPr>
               <a:t>aluno0</a:t>
             </a:r>
             <a:r>
-              <a:rPr lang="pt-BR" b="0" i="0" dirty="0">
+              <a:rPr kumimoji="0" lang="pt-BR" sz="1800" b="0" i="0" u="none" strike="noStrike" kern="1200" cap="none" spc="0" normalizeH="0" baseline="0" noProof="0" dirty="0">
+                <a:ln>
+                  <a:noFill/>
+                </a:ln>
                 <a:solidFill>
                   <a:srgbClr val="C53929"/>
                 </a:solidFill>
                 <a:effectLst/>
-                <a:latin typeface="Roboto Mono" pitchFamily="2" charset="0"/>
+                <a:uLnTx/>
+                <a:uFillTx/>
+                <a:latin typeface="Roboto Mono" pitchFamily="2" charset="0"/>
+                <a:ea typeface="+mn-ea"/>
+                <a:cs typeface="+mn-cs"/>
               </a:rPr>
               <a:t>}</a:t>
             </a:r>
             <a:r>
-              <a:rPr lang="pt-BR" b="0" i="0" dirty="0">
+              <a:rPr kumimoji="0" lang="pt-BR" sz="1800" b="0" i="0" u="none" strike="noStrike" kern="1200" cap="none" spc="0" normalizeH="0" baseline="0" noProof="0" dirty="0">
+                <a:ln>
+                  <a:noFill/>
+                </a:ln>
                 <a:solidFill>
                   <a:srgbClr val="388E3C"/>
                 </a:solidFill>
                 <a:effectLst/>
-                <a:latin typeface="Roboto Mono" pitchFamily="2" charset="0"/>
+                <a:uLnTx/>
+                <a:uFillTx/>
+                <a:latin typeface="Roboto Mono" pitchFamily="2" charset="0"/>
+                <a:ea typeface="+mn-ea"/>
+                <a:cs typeface="+mn-cs"/>
               </a:rPr>
               <a:t>"</a:t>
             </a:r>
             <a:r>
-              <a:rPr lang="pt-BR" b="0" i="0" dirty="0">
+              <a:rPr kumimoji="0" lang="pt-BR" sz="1800" b="0" i="0" u="none" strike="noStrike" kern="1200" cap="none" spc="0" normalizeH="0" baseline="0" noProof="0" dirty="0">
+                <a:ln>
+                  <a:noFill/>
+                </a:ln>
                 <a:solidFill>
                   <a:srgbClr val="37474F"/>
                 </a:solidFill>
                 <a:effectLst/>
-                <a:latin typeface="Roboto Mono" pitchFamily="2" charset="0"/>
+                <a:uLnTx/>
+                <a:uFillTx/>
+                <a:latin typeface="Roboto Mono" pitchFamily="2" charset="0"/>
+                <a:ea typeface="+mn-ea"/>
+                <a:cs typeface="+mn-cs"/>
               </a:rPr>
               <a:t>)</a:t>
             </a:r>
-            <a:endParaRPr lang="pt-BR" b="0" i="0" dirty="0">
+            <a:endParaRPr kumimoji="0" lang="pt-BR" sz="1800" b="0" i="0" u="none" strike="noStrike" kern="1200" cap="none" spc="0" normalizeH="0" baseline="0" noProof="0" dirty="0">
+              <a:ln>
+                <a:noFill/>
+              </a:ln>
               <a:solidFill>
                 <a:srgbClr val="000000"/>
               </a:solidFill>
               <a:effectLst/>
+              <a:uLnTx/>
+              <a:uFillTx/>
               <a:latin typeface="Roboto Mono" pitchFamily="2" charset="0"/>
+              <a:ea typeface="+mn-ea"/>
+              <a:cs typeface="+mn-cs"/>
             </a:endParaRPr>
           </a:p>
           <a:p>
-            <a:pPr algn="l">
+            <a:pPr marL="0" marR="0" lvl="0" indent="0" algn="l" defTabSz="914400" rtl="0" eaLnBrk="1" fontAlgn="auto" latinLnBrk="0" hangingPunct="1">
               <a:lnSpc>
                 <a:spcPts val="2813"/>
               </a:lnSpc>
-              <a:buNone/>
-            </a:pPr>
-            <a:endParaRPr lang="pt-BR" b="0" i="0" dirty="0">
+              <a:spcBef>
+                <a:spcPts val="0"/>
+              </a:spcBef>
+              <a:spcAft>
+                <a:spcPts val="0"/>
+              </a:spcAft>
+              <a:buClrTx/>
+              <a:buSzTx/>
+              <a:buFontTx/>
+              <a:buNone/>
+              <a:tabLst/>
+              <a:defRPr/>
+            </a:pPr>
+            <a:endParaRPr kumimoji="0" lang="pt-BR" sz="1800" b="0" i="0" u="none" strike="noStrike" kern="1200" cap="none" spc="0" normalizeH="0" baseline="0" noProof="0" dirty="0">
+              <a:ln>
+                <a:noFill/>
+              </a:ln>
               <a:solidFill>
                 <a:srgbClr val="000000"/>
               </a:solidFill>
               <a:effectLst/>
+              <a:uLnTx/>
+              <a:uFillTx/>
               <a:latin typeface="Roboto Mono" pitchFamily="2" charset="0"/>
+              <a:ea typeface="+mn-ea"/>
+              <a:cs typeface="+mn-cs"/>
             </a:endParaRPr>
           </a:p>
           <a:p>
-            <a:pPr algn="l">
+            <a:pPr marL="0" marR="0" lvl="0" indent="0" algn="l" defTabSz="914400" rtl="0" eaLnBrk="1" fontAlgn="auto" latinLnBrk="0" hangingPunct="1">
               <a:lnSpc>
                 <a:spcPts val="2813"/>
               </a:lnSpc>
-              <a:buNone/>
-            </a:pPr>
-            <a:r>
-              <a:rPr lang="pt-BR" b="0" i="0" dirty="0">
+              <a:spcBef>
+                <a:spcPts val="0"/>
+              </a:spcBef>
+              <a:spcAft>
+                <a:spcPts val="0"/>
+              </a:spcAft>
+              <a:buClrTx/>
+              <a:buSzTx/>
+              <a:buFontTx/>
+              <a:buNone/>
+              <a:tabLst/>
+              <a:defRPr/>
+            </a:pPr>
+            <a:r>
+              <a:rPr kumimoji="0" lang="pt-BR" sz="1800" b="0" i="0" u="none" strike="noStrike" kern="1200" cap="none" spc="0" normalizeH="0" baseline="0" noProof="0" dirty="0">
+                <a:ln>
+                  <a:noFill/>
+                </a:ln>
                 <a:solidFill>
                   <a:srgbClr val="D81B60"/>
                 </a:solidFill>
                 <a:effectLst/>
-                <a:latin typeface="Roboto Mono" pitchFamily="2" charset="0"/>
+                <a:uLnTx/>
+                <a:uFillTx/>
+                <a:latin typeface="Roboto Mono" pitchFamily="2" charset="0"/>
+                <a:ea typeface="+mn-ea"/>
+                <a:cs typeface="+mn-cs"/>
               </a:rPr>
               <a:t># Exibindo todos (nomeando um por um)</a:t>
             </a:r>
-            <a:endParaRPr lang="pt-BR" b="0" i="0" dirty="0">
+            <a:endParaRPr kumimoji="0" lang="pt-BR" sz="1800" b="0" i="0" u="none" strike="noStrike" kern="1200" cap="none" spc="0" normalizeH="0" baseline="0" noProof="0" dirty="0">
+              <a:ln>
+                <a:noFill/>
+              </a:ln>
               <a:solidFill>
                 <a:srgbClr val="000000"/>
               </a:solidFill>
               <a:effectLst/>
+              <a:uLnTx/>
+              <a:uFillTx/>
               <a:latin typeface="Roboto Mono" pitchFamily="2" charset="0"/>
+              <a:ea typeface="+mn-ea"/>
+              <a:cs typeface="+mn-cs"/>
             </a:endParaRPr>
           </a:p>
           <a:p>
-            <a:pPr algn="l">
+            <a:pPr marL="0" marR="0" lvl="0" indent="0" algn="l" defTabSz="914400" rtl="0" eaLnBrk="1" fontAlgn="auto" latinLnBrk="0" hangingPunct="1">
               <a:lnSpc>
                 <a:spcPts val="2813"/>
               </a:lnSpc>
-              <a:buNone/>
-            </a:pPr>
-            <a:r>
-              <a:rPr lang="pt-BR" b="0" i="0" dirty="0">
+              <a:spcBef>
+                <a:spcPts val="0"/>
+              </a:spcBef>
+              <a:spcAft>
+                <a:spcPts val="0"/>
+              </a:spcAft>
+              <a:buClrTx/>
+              <a:buSzTx/>
+              <a:buFontTx/>
+              <a:buNone/>
+              <a:tabLst/>
+              <a:defRPr/>
+            </a:pPr>
+            <a:r>
+              <a:rPr kumimoji="0" lang="pt-BR" sz="1800" b="0" i="0" u="none" strike="noStrike" kern="1200" cap="none" spc="0" normalizeH="0" baseline="0" noProof="0" dirty="0">
+                <a:ln>
+                  <a:noFill/>
+                </a:ln>
                 <a:solidFill>
                   <a:srgbClr val="37474F"/>
                 </a:solidFill>
                 <a:effectLst/>
-                <a:latin typeface="Roboto Mono" pitchFamily="2" charset="0"/>
+                <a:uLnTx/>
+                <a:uFillTx/>
+                <a:latin typeface="Roboto Mono" pitchFamily="2" charset="0"/>
+                <a:ea typeface="+mn-ea"/>
+                <a:cs typeface="+mn-cs"/>
               </a:rPr>
               <a:t>print(</a:t>
             </a:r>
             <a:r>
-              <a:rPr lang="pt-BR" b="0" i="0" dirty="0" err="1">
+              <a:rPr kumimoji="0" lang="pt-BR" sz="1800" b="0" i="0" u="none" strike="noStrike" kern="1200" cap="none" spc="0" normalizeH="0" baseline="0" noProof="0" dirty="0" err="1">
+                <a:ln>
+                  <a:noFill/>
+                </a:ln>
                 <a:solidFill>
                   <a:srgbClr val="3F51B5"/>
                 </a:solidFill>
                 <a:effectLst/>
-                <a:latin typeface="Roboto Mono" pitchFamily="2" charset="0"/>
+                <a:uLnTx/>
+                <a:uFillTx/>
+                <a:latin typeface="Roboto Mono" pitchFamily="2" charset="0"/>
+                <a:ea typeface="+mn-ea"/>
+                <a:cs typeface="+mn-cs"/>
               </a:rPr>
               <a:t>f</a:t>
             </a:r>
             <a:r>
-              <a:rPr lang="pt-BR" b="0" i="0" dirty="0" err="1">
+              <a:rPr kumimoji="0" lang="pt-BR" sz="1800" b="0" i="0" u="none" strike="noStrike" kern="1200" cap="none" spc="0" normalizeH="0" baseline="0" noProof="0" dirty="0" err="1">
+                <a:ln>
+                  <a:noFill/>
+                </a:ln>
                 <a:solidFill>
                   <a:srgbClr val="388E3C"/>
                 </a:solidFill>
                 <a:effectLst/>
-                <a:latin typeface="Roboto Mono" pitchFamily="2" charset="0"/>
+                <a:uLnTx/>
+                <a:uFillTx/>
+                <a:latin typeface="Roboto Mono" pitchFamily="2" charset="0"/>
+                <a:ea typeface="+mn-ea"/>
+                <a:cs typeface="+mn-cs"/>
               </a:rPr>
               <a:t>"A</a:t>
             </a:r>
             <a:r>
-              <a:rPr lang="pt-BR" b="0" i="0" dirty="0">
+              <a:rPr kumimoji="0" lang="pt-BR" sz="1800" b="0" i="0" u="none" strike="noStrike" kern="1200" cap="none" spc="0" normalizeH="0" baseline="0" noProof="0" dirty="0">
+                <a:ln>
+                  <a:noFill/>
+                </a:ln>
                 <a:solidFill>
                   <a:srgbClr val="388E3C"/>
                 </a:solidFill>
                 <a:effectLst/>
-                <a:latin typeface="Roboto Mono" pitchFamily="2" charset="0"/>
+                <a:uLnTx/>
+                <a:uFillTx/>
+                <a:latin typeface="Roboto Mono" pitchFamily="2" charset="0"/>
+                <a:ea typeface="+mn-ea"/>
+                <a:cs typeface="+mn-cs"/>
               </a:rPr>
               <a:t> lista completa: </a:t>
             </a:r>
             <a:r>
-              <a:rPr lang="pt-BR" b="0" i="0" dirty="0">
+              <a:rPr kumimoji="0" lang="pt-BR" sz="1800" b="0" i="0" u="none" strike="noStrike" kern="1200" cap="none" spc="0" normalizeH="0" baseline="0" noProof="0" dirty="0">
+                <a:ln>
+                  <a:noFill/>
+                </a:ln>
                 <a:solidFill>
                   <a:srgbClr val="C53929"/>
                 </a:solidFill>
                 <a:effectLst/>
-                <a:latin typeface="Roboto Mono" pitchFamily="2" charset="0"/>
+                <a:uLnTx/>
+                <a:uFillTx/>
+                <a:latin typeface="Roboto Mono" pitchFamily="2" charset="0"/>
+                <a:ea typeface="+mn-ea"/>
+                <a:cs typeface="+mn-cs"/>
               </a:rPr>
               <a:t>{</a:t>
             </a:r>
             <a:r>
-              <a:rPr lang="pt-BR" b="0" i="0" dirty="0">
+              <a:rPr kumimoji="0" lang="pt-BR" sz="1800" b="0" i="0" u="none" strike="noStrike" kern="1200" cap="none" spc="0" normalizeH="0" baseline="0" noProof="0" dirty="0">
+                <a:ln>
+                  <a:noFill/>
+                </a:ln>
                 <a:solidFill>
                   <a:srgbClr val="37474F"/>
                 </a:solidFill>
                 <a:effectLst/>
-                <a:latin typeface="Roboto Mono" pitchFamily="2" charset="0"/>
+                <a:uLnTx/>
+                <a:uFillTx/>
+                <a:latin typeface="Roboto Mono" pitchFamily="2" charset="0"/>
+                <a:ea typeface="+mn-ea"/>
+                <a:cs typeface="+mn-cs"/>
               </a:rPr>
               <a:t>aluno0</a:t>
             </a:r>
             <a:r>
-              <a:rPr lang="pt-BR" b="0" i="0" dirty="0">
+              <a:rPr kumimoji="0" lang="pt-BR" sz="1800" b="0" i="0" u="none" strike="noStrike" kern="1200" cap="none" spc="0" normalizeH="0" baseline="0" noProof="0" dirty="0">
+                <a:ln>
+                  <a:noFill/>
+                </a:ln>
                 <a:solidFill>
                   <a:srgbClr val="C53929"/>
                 </a:solidFill>
                 <a:effectLst/>
-                <a:latin typeface="Roboto Mono" pitchFamily="2" charset="0"/>
+                <a:uLnTx/>
+                <a:uFillTx/>
+                <a:latin typeface="Roboto Mono" pitchFamily="2" charset="0"/>
+                <a:ea typeface="+mn-ea"/>
+                <a:cs typeface="+mn-cs"/>
               </a:rPr>
               <a:t>}</a:t>
             </a:r>
             <a:r>
-              <a:rPr lang="pt-BR" b="0" i="0" dirty="0">
+              <a:rPr kumimoji="0" lang="pt-BR" sz="1800" b="0" i="0" u="none" strike="noStrike" kern="1200" cap="none" spc="0" normalizeH="0" baseline="0" noProof="0" dirty="0">
+                <a:ln>
+                  <a:noFill/>
+                </a:ln>
                 <a:solidFill>
                   <a:srgbClr val="388E3C"/>
                 </a:solidFill>
                 <a:effectLst/>
-                <a:latin typeface="Roboto Mono" pitchFamily="2" charset="0"/>
+                <a:uLnTx/>
+                <a:uFillTx/>
+                <a:latin typeface="Roboto Mono" pitchFamily="2" charset="0"/>
+                <a:ea typeface="+mn-ea"/>
+                <a:cs typeface="+mn-cs"/>
               </a:rPr>
               <a:t>, </a:t>
             </a:r>
             <a:r>
-              <a:rPr lang="pt-BR" b="0" i="0" dirty="0">
+              <a:rPr kumimoji="0" lang="pt-BR" sz="1800" b="0" i="0" u="none" strike="noStrike" kern="1200" cap="none" spc="0" normalizeH="0" baseline="0" noProof="0" dirty="0">
+                <a:ln>
+                  <a:noFill/>
+                </a:ln>
                 <a:solidFill>
                   <a:srgbClr val="C53929"/>
                 </a:solidFill>
                 <a:effectLst/>
-                <a:latin typeface="Roboto Mono" pitchFamily="2" charset="0"/>
+                <a:uLnTx/>
+                <a:uFillTx/>
+                <a:latin typeface="Roboto Mono" pitchFamily="2" charset="0"/>
+                <a:ea typeface="+mn-ea"/>
+                <a:cs typeface="+mn-cs"/>
               </a:rPr>
               <a:t>{</a:t>
             </a:r>
             <a:r>
-              <a:rPr lang="pt-BR" b="0" i="0" dirty="0">
+              <a:rPr kumimoji="0" lang="pt-BR" sz="1800" b="0" i="0" u="none" strike="noStrike" kern="1200" cap="none" spc="0" normalizeH="0" baseline="0" noProof="0" dirty="0">
+                <a:ln>
+                  <a:noFill/>
+                </a:ln>
                 <a:solidFill>
                   <a:srgbClr val="37474F"/>
                 </a:solidFill>
                 <a:effectLst/>
-                <a:latin typeface="Roboto Mono" pitchFamily="2" charset="0"/>
+                <a:uLnTx/>
+                <a:uFillTx/>
+                <a:latin typeface="Roboto Mono" pitchFamily="2" charset="0"/>
+                <a:ea typeface="+mn-ea"/>
+                <a:cs typeface="+mn-cs"/>
               </a:rPr>
               <a:t>aluno1</a:t>
             </a:r>
             <a:r>
-              <a:rPr lang="pt-BR" b="0" i="0" dirty="0">
+              <a:rPr kumimoji="0" lang="pt-BR" sz="1800" b="0" i="0" u="none" strike="noStrike" kern="1200" cap="none" spc="0" normalizeH="0" baseline="0" noProof="0" dirty="0">
+                <a:ln>
+                  <a:noFill/>
+                </a:ln>
                 <a:solidFill>
                   <a:srgbClr val="C53929"/>
                 </a:solidFill>
                 <a:effectLst/>
-                <a:latin typeface="Roboto Mono" pitchFamily="2" charset="0"/>
+                <a:uLnTx/>
+                <a:uFillTx/>
+                <a:latin typeface="Roboto Mono" pitchFamily="2" charset="0"/>
+                <a:ea typeface="+mn-ea"/>
+                <a:cs typeface="+mn-cs"/>
               </a:rPr>
               <a:t>}</a:t>
             </a:r>
             <a:r>
-              <a:rPr lang="pt-BR" b="0" i="0" dirty="0">
+              <a:rPr kumimoji="0" lang="pt-BR" sz="1800" b="0" i="0" u="none" strike="noStrike" kern="1200" cap="none" spc="0" normalizeH="0" baseline="0" noProof="0" dirty="0">
+                <a:ln>
+                  <a:noFill/>
+                </a:ln>
                 <a:solidFill>
                   <a:srgbClr val="388E3C"/>
                 </a:solidFill>
                 <a:effectLst/>
-                <a:latin typeface="Roboto Mono" pitchFamily="2" charset="0"/>
+                <a:uLnTx/>
+                <a:uFillTx/>
+                <a:latin typeface="Roboto Mono" pitchFamily="2" charset="0"/>
+                <a:ea typeface="+mn-ea"/>
+                <a:cs typeface="+mn-cs"/>
               </a:rPr>
               <a:t>, </a:t>
             </a:r>
             <a:r>
-              <a:rPr lang="pt-BR" b="0" i="0" dirty="0">
+              <a:rPr kumimoji="0" lang="pt-BR" sz="1800" b="0" i="0" u="none" strike="noStrike" kern="1200" cap="none" spc="0" normalizeH="0" baseline="0" noProof="0" dirty="0">
+                <a:ln>
+                  <a:noFill/>
+                </a:ln>
                 <a:solidFill>
                   <a:srgbClr val="C53929"/>
                 </a:solidFill>
                 <a:effectLst/>
-                <a:latin typeface="Roboto Mono" pitchFamily="2" charset="0"/>
+                <a:uLnTx/>
+                <a:uFillTx/>
+                <a:latin typeface="Roboto Mono" pitchFamily="2" charset="0"/>
+                <a:ea typeface="+mn-ea"/>
+                <a:cs typeface="+mn-cs"/>
               </a:rPr>
               <a:t>{</a:t>
             </a:r>
             <a:r>
-              <a:rPr lang="pt-BR" b="0" i="0" dirty="0">
+              <a:rPr kumimoji="0" lang="pt-BR" sz="1800" b="0" i="0" u="none" strike="noStrike" kern="1200" cap="none" spc="0" normalizeH="0" baseline="0" noProof="0" dirty="0">
+                <a:ln>
+                  <a:noFill/>
+                </a:ln>
                 <a:solidFill>
                   <a:srgbClr val="37474F"/>
                 </a:solidFill>
                 <a:effectLst/>
-                <a:latin typeface="Roboto Mono" pitchFamily="2" charset="0"/>
+                <a:uLnTx/>
+                <a:uFillTx/>
+                <a:latin typeface="Roboto Mono" pitchFamily="2" charset="0"/>
+                <a:ea typeface="+mn-ea"/>
+                <a:cs typeface="+mn-cs"/>
               </a:rPr>
               <a:t>aluno2</a:t>
             </a:r>
             <a:r>
-              <a:rPr lang="pt-BR" b="0" i="0" dirty="0">
+              <a:rPr kumimoji="0" lang="pt-BR" sz="1800" b="0" i="0" u="none" strike="noStrike" kern="1200" cap="none" spc="0" normalizeH="0" baseline="0" noProof="0" dirty="0">
+                <a:ln>
+                  <a:noFill/>
+                </a:ln>
                 <a:solidFill>
                   <a:srgbClr val="C53929"/>
                 </a:solidFill>
                 <a:effectLst/>
-                <a:latin typeface="Roboto Mono" pitchFamily="2" charset="0"/>
+                <a:uLnTx/>
+                <a:uFillTx/>
+                <a:latin typeface="Roboto Mono" pitchFamily="2" charset="0"/>
+                <a:ea typeface="+mn-ea"/>
+                <a:cs typeface="+mn-cs"/>
               </a:rPr>
               <a:t>}</a:t>
             </a:r>
             <a:r>
-              <a:rPr lang="pt-BR" b="0" i="0" dirty="0">
+              <a:rPr kumimoji="0" lang="pt-BR" sz="1800" b="0" i="0" u="none" strike="noStrike" kern="1200" cap="none" spc="0" normalizeH="0" baseline="0" noProof="0" dirty="0">
+                <a:ln>
+                  <a:noFill/>
+                </a:ln>
                 <a:solidFill>
                   <a:srgbClr val="388E3C"/>
                 </a:solidFill>
                 <a:effectLst/>
-                <a:latin typeface="Roboto Mono" pitchFamily="2" charset="0"/>
+                <a:uLnTx/>
+                <a:uFillTx/>
+                <a:latin typeface="Roboto Mono" pitchFamily="2" charset="0"/>
+                <a:ea typeface="+mn-ea"/>
+                <a:cs typeface="+mn-cs"/>
               </a:rPr>
               <a:t>, </a:t>
             </a:r>
             <a:r>
-              <a:rPr lang="pt-BR" b="0" i="0" dirty="0">
+              <a:rPr kumimoji="0" lang="pt-BR" sz="1800" b="0" i="0" u="none" strike="noStrike" kern="1200" cap="none" spc="0" normalizeH="0" baseline="0" noProof="0" dirty="0">
+                <a:ln>
+                  <a:noFill/>
+                </a:ln>
                 <a:solidFill>
                   <a:srgbClr val="C53929"/>
                 </a:solidFill>
                 <a:effectLst/>
-                <a:latin typeface="Roboto Mono" pitchFamily="2" charset="0"/>
+                <a:uLnTx/>
+                <a:uFillTx/>
+                <a:latin typeface="Roboto Mono" pitchFamily="2" charset="0"/>
+                <a:ea typeface="+mn-ea"/>
+                <a:cs typeface="+mn-cs"/>
               </a:rPr>
               <a:t>{</a:t>
             </a:r>
             <a:r>
-              <a:rPr lang="pt-BR" b="0" i="0" dirty="0">
+              <a:rPr kumimoji="0" lang="pt-BR" sz="1800" b="0" i="0" u="none" strike="noStrike" kern="1200" cap="none" spc="0" normalizeH="0" baseline="0" noProof="0" dirty="0">
+                <a:ln>
+                  <a:noFill/>
+                </a:ln>
                 <a:solidFill>
                   <a:srgbClr val="37474F"/>
                 </a:solidFill>
                 <a:effectLst/>
-                <a:latin typeface="Roboto Mono" pitchFamily="2" charset="0"/>
+                <a:uLnTx/>
+                <a:uFillTx/>
+                <a:latin typeface="Roboto Mono" pitchFamily="2" charset="0"/>
+                <a:ea typeface="+mn-ea"/>
+                <a:cs typeface="+mn-cs"/>
               </a:rPr>
               <a:t>aluno3</a:t>
             </a:r>
             <a:r>
-              <a:rPr lang="pt-BR" b="0" i="0" dirty="0">
+              <a:rPr kumimoji="0" lang="pt-BR" sz="1800" b="0" i="0" u="none" strike="noStrike" kern="1200" cap="none" spc="0" normalizeH="0" baseline="0" noProof="0" dirty="0">
+                <a:ln>
+                  <a:noFill/>
+                </a:ln>
                 <a:solidFill>
                   <a:srgbClr val="C53929"/>
                 </a:solidFill>
                 <a:effectLst/>
-                <a:latin typeface="Roboto Mono" pitchFamily="2" charset="0"/>
+                <a:uLnTx/>
+                <a:uFillTx/>
+                <a:latin typeface="Roboto Mono" pitchFamily="2" charset="0"/>
+                <a:ea typeface="+mn-ea"/>
+                <a:cs typeface="+mn-cs"/>
               </a:rPr>
               <a:t>}</a:t>
             </a:r>
             <a:r>
-              <a:rPr lang="pt-BR" b="0" i="0" dirty="0">
+              <a:rPr kumimoji="0" lang="pt-BR" sz="1800" b="0" i="0" u="none" strike="noStrike" kern="1200" cap="none" spc="0" normalizeH="0" baseline="0" noProof="0" dirty="0">
+                <a:ln>
+                  <a:noFill/>
+                </a:ln>
                 <a:solidFill>
                   <a:srgbClr val="388E3C"/>
                 </a:solidFill>
                 <a:effectLst/>
-                <a:latin typeface="Roboto Mono" pitchFamily="2" charset="0"/>
+                <a:uLnTx/>
+                <a:uFillTx/>
+                <a:latin typeface="Roboto Mono" pitchFamily="2" charset="0"/>
+                <a:ea typeface="+mn-ea"/>
+                <a:cs typeface="+mn-cs"/>
               </a:rPr>
               <a:t>"</a:t>
             </a:r>
             <a:r>
-              <a:rPr lang="pt-BR" b="0" i="0" dirty="0">
+              <a:rPr kumimoji="0" lang="pt-BR" sz="1800" b="0" i="0" u="none" strike="noStrike" kern="1200" cap="none" spc="0" normalizeH="0" baseline="0" noProof="0" dirty="0">
+                <a:ln>
+                  <a:noFill/>
+                </a:ln>
                 <a:solidFill>
                   <a:srgbClr val="37474F"/>
                 </a:solidFill>
                 <a:effectLst/>
-                <a:latin typeface="Roboto Mono" pitchFamily="2" charset="0"/>
+                <a:uLnTx/>
+                <a:uFillTx/>
+                <a:latin typeface="Roboto Mono" pitchFamily="2" charset="0"/>
+                <a:ea typeface="+mn-ea"/>
+                <a:cs typeface="+mn-cs"/>
               </a:rPr>
               <a:t>)</a:t>
             </a:r>
-            <a:endParaRPr lang="pt-BR" b="0" i="0" dirty="0">
+            <a:endParaRPr kumimoji="0" lang="pt-BR" sz="1800" b="0" i="0" u="none" strike="noStrike" kern="1200" cap="none" spc="0" normalizeH="0" baseline="0" noProof="0" dirty="0">
+              <a:ln>
+                <a:noFill/>
+              </a:ln>
               <a:solidFill>
                 <a:srgbClr val="000000"/>
               </a:solidFill>
               <a:effectLst/>
+              <a:uLnTx/>
+              <a:uFillTx/>
               <a:latin typeface="Roboto Mono" pitchFamily="2" charset="0"/>
+              <a:ea typeface="+mn-ea"/>
+              <a:cs typeface="+mn-cs"/>
             </a:endParaRPr>
           </a:p>
         </p:txBody>
